--- a/orientation_startsemester/Introduction to Artificial Intelligence_distributed.pptx
+++ b/orientation_startsemester/Introduction to Artificial Intelligence_distributed.pptx
@@ -125,76 +125,35 @@
 </p:presentation>
 </file>
 
+<file path=ppt/revisionInfo.xml><?xml version="1.0" encoding="utf-8"?>
+<p1510:revInfo xmlns:a="http://schemas.openxmlformats.org/drawingml/2006/main" xmlns:r="http://schemas.openxmlformats.org/officeDocument/2006/relationships" xmlns:p1510="http://schemas.microsoft.com/office/powerpoint/2015/10/main">
+  <p1510:revLst>
+    <p1510:client id="{1AD7AD87-EF48-7F4D-B115-283643822D1A}" v="57" dt="2026-03-11T10:43:12.083"/>
+  </p1510:revLst>
+</p1510:revInfo>
+</file>
+
 <file path=ppt/changesInfos/changesInfo1.xml><?xml version="1.0" encoding="utf-8"?>
 <pc:chgInfo xmlns:a="http://schemas.openxmlformats.org/drawingml/2006/main" xmlns:r="http://schemas.openxmlformats.org/officeDocument/2006/relationships" xmlns:ac="http://schemas.microsoft.com/office/drawing/2013/main/command" xmlns:pc="http://schemas.microsoft.com/office/powerpoint/2013/main/command">
   <pc:docChgLst>
-    <pc:chgData name="Mossavat,Iman S.I." userId="2fc35bef-1e74-4f2a-8cd9-22dc0d049874" providerId="ADAL" clId="{895937E2-0E02-49DC-900B-69A075A12F3C}"/>
-    <pc:docChg chg="custSel delSld modSld">
-      <pc:chgData name="Mossavat,Iman S.I." userId="2fc35bef-1e74-4f2a-8cd9-22dc0d049874" providerId="ADAL" clId="{895937E2-0E02-49DC-900B-69A075A12F3C}" dt="2025-09-08T14:10:50.742" v="2148" actId="20577"/>
+    <pc:chgData name="Mossavat,Iman S.I." userId="2fc35bef-1e74-4f2a-8cd9-22dc0d049874" providerId="ADAL" clId="{51D11529-0CF3-57D3-80A7-4BCA470D3E3A}"/>
+    <pc:docChg chg="addSld delSld modSld">
+      <pc:chgData name="Mossavat,Iman S.I." userId="2fc35bef-1e74-4f2a-8cd9-22dc0d049874" providerId="ADAL" clId="{51D11529-0CF3-57D3-80A7-4BCA470D3E3A}" dt="2026-03-11T10:43:57.463" v="59" actId="2696"/>
       <pc:docMkLst>
         <pc:docMk/>
       </pc:docMkLst>
-      <pc:sldChg chg="modNotesTx">
-        <pc:chgData name="Mossavat,Iman S.I." userId="2fc35bef-1e74-4f2a-8cd9-22dc0d049874" providerId="ADAL" clId="{895937E2-0E02-49DC-900B-69A075A12F3C}" dt="2025-09-08T14:07:30.742" v="1345" actId="20577"/>
+      <pc:sldChg chg="modSp new del mod">
+        <pc:chgData name="Mossavat,Iman S.I." userId="2fc35bef-1e74-4f2a-8cd9-22dc0d049874" providerId="ADAL" clId="{51D11529-0CF3-57D3-80A7-4BCA470D3E3A}" dt="2026-03-11T10:43:57.463" v="59" actId="2696"/>
         <pc:sldMkLst>
           <pc:docMk/>
-          <pc:sldMk cId="986333906" sldId="798"/>
+          <pc:sldMk cId="3706957552" sldId="826"/>
         </pc:sldMkLst>
-      </pc:sldChg>
-      <pc:sldChg chg="modNotesTx">
-        <pc:chgData name="Mossavat,Iman S.I." userId="2fc35bef-1e74-4f2a-8cd9-22dc0d049874" providerId="ADAL" clId="{895937E2-0E02-49DC-900B-69A075A12F3C}" dt="2025-09-08T14:10:50.742" v="2148" actId="20577"/>
-        <pc:sldMkLst>
-          <pc:docMk/>
-          <pc:sldMk cId="3192507121" sldId="812"/>
-        </pc:sldMkLst>
-      </pc:sldChg>
-      <pc:sldChg chg="modNotesTx">
-        <pc:chgData name="Mossavat,Iman S.I." userId="2fc35bef-1e74-4f2a-8cd9-22dc0d049874" providerId="ADAL" clId="{895937E2-0E02-49DC-900B-69A075A12F3C}" dt="2025-09-08T14:09:38.986" v="1845" actId="20577"/>
-        <pc:sldMkLst>
-          <pc:docMk/>
-          <pc:sldMk cId="1790138125" sldId="814"/>
-        </pc:sldMkLst>
-      </pc:sldChg>
-      <pc:sldChg chg="modNotesTx">
-        <pc:chgData name="Mossavat,Iman S.I." userId="2fc35bef-1e74-4f2a-8cd9-22dc0d049874" providerId="ADAL" clId="{895937E2-0E02-49DC-900B-69A075A12F3C}" dt="2025-09-08T14:05:36.317" v="1031" actId="20577"/>
-        <pc:sldMkLst>
-          <pc:docMk/>
-          <pc:sldMk cId="564013236" sldId="818"/>
-        </pc:sldMkLst>
-      </pc:sldChg>
-      <pc:sldChg chg="del">
-        <pc:chgData name="Mossavat,Iman S.I." userId="2fc35bef-1e74-4f2a-8cd9-22dc0d049874" providerId="ADAL" clId="{895937E2-0E02-49DC-900B-69A075A12F3C}" dt="2025-09-08T14:01:26.391" v="1" actId="47"/>
-        <pc:sldMkLst>
-          <pc:docMk/>
-          <pc:sldMk cId="3865114132" sldId="821"/>
-        </pc:sldMkLst>
-      </pc:sldChg>
-      <pc:sldChg chg="del">
-        <pc:chgData name="Mossavat,Iman S.I." userId="2fc35bef-1e74-4f2a-8cd9-22dc0d049874" providerId="ADAL" clId="{895937E2-0E02-49DC-900B-69A075A12F3C}" dt="2025-09-08T14:01:15.561" v="0" actId="47"/>
-        <pc:sldMkLst>
-          <pc:docMk/>
-          <pc:sldMk cId="517225597" sldId="823"/>
-        </pc:sldMkLst>
-      </pc:sldChg>
-      <pc:sldChg chg="modNotesTx">
-        <pc:chgData name="Mossavat,Iman S.I." userId="2fc35bef-1e74-4f2a-8cd9-22dc0d049874" providerId="ADAL" clId="{895937E2-0E02-49DC-900B-69A075A12F3C}" dt="2025-09-08T14:08:21.072" v="1567" actId="20577"/>
-        <pc:sldMkLst>
-          <pc:docMk/>
-          <pc:sldMk cId="2024391789" sldId="824"/>
-        </pc:sldMkLst>
-      </pc:sldChg>
-      <pc:sldChg chg="addSp modSp mod modNotesTx">
-        <pc:chgData name="Mossavat,Iman S.I." userId="2fc35bef-1e74-4f2a-8cd9-22dc0d049874" providerId="ADAL" clId="{895937E2-0E02-49DC-900B-69A075A12F3C}" dt="2025-09-08T14:06:35.458" v="1163" actId="208"/>
-        <pc:sldMkLst>
-          <pc:docMk/>
-          <pc:sldMk cId="349190547" sldId="825"/>
-        </pc:sldMkLst>
-        <pc:spChg chg="add mod">
-          <ac:chgData name="Mossavat,Iman S.I." userId="2fc35bef-1e74-4f2a-8cd9-22dc0d049874" providerId="ADAL" clId="{895937E2-0E02-49DC-900B-69A075A12F3C}" dt="2025-09-08T14:06:35.458" v="1163" actId="208"/>
+        <pc:spChg chg="mod">
+          <ac:chgData name="Mossavat,Iman S.I." userId="2fc35bef-1e74-4f2a-8cd9-22dc0d049874" providerId="ADAL" clId="{51D11529-0CF3-57D3-80A7-4BCA470D3E3A}" dt="2026-03-11T10:43:12.083" v="58" actId="20577"/>
           <ac:spMkLst>
             <pc:docMk/>
-            <pc:sldMk cId="349190547" sldId="825"/>
-            <ac:spMk id="4" creationId="{7465F882-4D6E-EC0F-6184-147D76A42A33}"/>
+            <pc:sldMk cId="3706957552" sldId="826"/>
+            <ac:spMk id="3" creationId="{74A8EA1D-D909-05EE-3BAC-5D47D7289CEF}"/>
           </ac:spMkLst>
         </pc:spChg>
       </pc:sldChg>
@@ -3806,9 +3765,9 @@
     <dgm:cxn modelId="{9238DB24-BECD-4642-85C1-52D25FC73CB3}" type="presOf" srcId="{489BB1A3-021B-473E-B2F9-589532D0EB83}" destId="{B7B678F8-1C54-4B83-B9DF-A26B1B7D39F8}" srcOrd="0" destOrd="0" presId="urn:microsoft.com/office/officeart/2005/8/layout/default"/>
     <dgm:cxn modelId="{5F24B42F-C1E5-48F1-BEA8-AF91BA96D442}" srcId="{0B759015-8B4D-445E-9488-ACF536ECEF45}" destId="{489BB1A3-021B-473E-B2F9-589532D0EB83}" srcOrd="3" destOrd="0" parTransId="{F32E9BCB-F141-402E-AAF8-696A9FE7587B}" sibTransId="{08C89B43-FA5E-44FE-8954-6329D87597C9}"/>
     <dgm:cxn modelId="{4823013A-37DE-4D79-9177-4807690D5B21}" type="presOf" srcId="{CA426ABC-6391-41A9-B9D4-876E5D5A7E5C}" destId="{D7877979-9C9C-4C4C-951D-211EAC6D6A0E}" srcOrd="0" destOrd="0" presId="urn:microsoft.com/office/officeart/2005/8/layout/default"/>
+    <dgm:cxn modelId="{73BEB250-290F-4F85-AE8C-9A135C89B298}" srcId="{0B759015-8B4D-445E-9488-ACF536ECEF45}" destId="{67F472AC-6A44-4BFA-90F6-DCC222B7C7AE}" srcOrd="1" destOrd="0" parTransId="{BEB2DBEE-81FA-4D90-B40C-E5390AFB5D27}" sibTransId="{28448B13-1CAB-4AF2-BCBA-DAF603B38C63}"/>
     <dgm:cxn modelId="{3E093862-D89C-4743-B21E-5BB764D5E055}" type="presOf" srcId="{0B759015-8B4D-445E-9488-ACF536ECEF45}" destId="{3CC2E68A-F40F-41E6-9D9E-D3683B39B793}" srcOrd="0" destOrd="0" presId="urn:microsoft.com/office/officeart/2005/8/layout/default"/>
     <dgm:cxn modelId="{5232BA6B-A95B-4D99-8A93-C056F56B39EE}" srcId="{0B759015-8B4D-445E-9488-ACF536ECEF45}" destId="{FFB1952D-6826-4691-9DB4-00CB3CE5CE6B}" srcOrd="0" destOrd="0" parTransId="{CF432243-7866-4D5A-BD0A-24F7090C1E1B}" sibTransId="{677556A9-6912-4859-A410-27D1AED5D9DE}"/>
-    <dgm:cxn modelId="{73BEB250-290F-4F85-AE8C-9A135C89B298}" srcId="{0B759015-8B4D-445E-9488-ACF536ECEF45}" destId="{67F472AC-6A44-4BFA-90F6-DCC222B7C7AE}" srcOrd="1" destOrd="0" parTransId="{BEB2DBEE-81FA-4D90-B40C-E5390AFB5D27}" sibTransId="{28448B13-1CAB-4AF2-BCBA-DAF603B38C63}"/>
     <dgm:cxn modelId="{2FD56B7A-A88B-4839-94B4-820CCF9380D5}" type="presOf" srcId="{FFB1952D-6826-4691-9DB4-00CB3CE5CE6B}" destId="{BEC7712E-DE89-4828-8BAB-133877C88731}" srcOrd="0" destOrd="0" presId="urn:microsoft.com/office/officeart/2005/8/layout/default"/>
     <dgm:cxn modelId="{5E9F847F-9C73-4972-9412-A6185FCAFF78}" srcId="{0B759015-8B4D-445E-9488-ACF536ECEF45}" destId="{CA426ABC-6391-41A9-B9D4-876E5D5A7E5C}" srcOrd="6" destOrd="0" parTransId="{64BFD3E9-6529-4632-A617-45CED46BA2F5}" sibTransId="{91886E2B-7206-46F5-A1AA-8B0EB6C980EB}"/>
     <dgm:cxn modelId="{BF789299-AC12-4613-85CE-3F45FDD5D15F}" srcId="{0B759015-8B4D-445E-9488-ACF536ECEF45}" destId="{76F8D689-BC26-4C60-882D-0C9E3AE91442}" srcOrd="4" destOrd="0" parTransId="{EE54032F-CDB0-4F0F-9918-BF98B515B43E}" sibTransId="{8E324B7D-E760-40C6-B072-1A6ADBC97C68}"/>
@@ -10033,7 +9992,7 @@
           <a:p>
             <a:fld id="{542DCB0F-B87B-4B4E-BDCD-2EB9E0FDC28C}" type="datetimeFigureOut">
               <a:rPr lang="en-NL" smtClean="0"/>
-              <a:t>08/09/2025</a:t>
+              <a:t>11/03/2026</a:t>
             </a:fld>
             <a:endParaRPr lang="en-NL"/>
           </a:p>
@@ -11204,7 +11163,7 @@
           <a:p>
             <a:fld id="{E80C50CD-E178-4744-9B35-B2F624D6C5E9}" type="datetimeFigureOut">
               <a:rPr lang="en-US" smtClean="0"/>
-              <a:t>9/8/2025</a:t>
+              <a:t>3/11/26</a:t>
             </a:fld>
             <a:endParaRPr lang="en-US"/>
           </a:p>
@@ -11402,7 +11361,7 @@
           <a:p>
             <a:fld id="{E80C50CD-E178-4744-9B35-B2F624D6C5E9}" type="datetimeFigureOut">
               <a:rPr lang="en-US" smtClean="0"/>
-              <a:t>9/8/2025</a:t>
+              <a:t>3/11/26</a:t>
             </a:fld>
             <a:endParaRPr lang="en-US"/>
           </a:p>
@@ -11610,7 +11569,7 @@
           <a:p>
             <a:fld id="{E80C50CD-E178-4744-9B35-B2F624D6C5E9}" type="datetimeFigureOut">
               <a:rPr lang="en-US" smtClean="0"/>
-              <a:t>9/8/2025</a:t>
+              <a:t>3/11/26</a:t>
             </a:fld>
             <a:endParaRPr lang="en-US"/>
           </a:p>
@@ -11860,7 +11819,7 @@
           <a:p>
             <a:fld id="{E80C50CD-E178-4744-9B35-B2F624D6C5E9}" type="datetimeFigureOut">
               <a:rPr lang="en-US" smtClean="0"/>
-              <a:t>9/8/2025</a:t>
+              <a:t>3/11/26</a:t>
             </a:fld>
             <a:endParaRPr lang="en-US"/>
           </a:p>
@@ -12139,7 +12098,7 @@
           <a:p>
             <a:fld id="{E80C50CD-E178-4744-9B35-B2F624D6C5E9}" type="datetimeFigureOut">
               <a:rPr lang="en-US" smtClean="0"/>
-              <a:t>9/8/2025</a:t>
+              <a:t>3/11/26</a:t>
             </a:fld>
             <a:endParaRPr lang="en-US"/>
           </a:p>
@@ -12456,7 +12415,7 @@
           <a:p>
             <a:fld id="{E80C50CD-E178-4744-9B35-B2F624D6C5E9}" type="datetimeFigureOut">
               <a:rPr lang="en-US" smtClean="0"/>
-              <a:t>9/8/2025</a:t>
+              <a:t>3/11/26</a:t>
             </a:fld>
             <a:endParaRPr lang="en-US"/>
           </a:p>
@@ -12872,7 +12831,7 @@
           <a:p>
             <a:fld id="{E80C50CD-E178-4744-9B35-B2F624D6C5E9}" type="datetimeFigureOut">
               <a:rPr lang="en-US" smtClean="0"/>
-              <a:t>9/8/2025</a:t>
+              <a:t>3/11/26</a:t>
             </a:fld>
             <a:endParaRPr lang="en-US"/>
           </a:p>
@@ -13013,7 +12972,7 @@
           <a:p>
             <a:fld id="{E80C50CD-E178-4744-9B35-B2F624D6C5E9}" type="datetimeFigureOut">
               <a:rPr lang="en-US" smtClean="0"/>
-              <a:t>9/8/2025</a:t>
+              <a:t>3/11/26</a:t>
             </a:fld>
             <a:endParaRPr lang="en-US"/>
           </a:p>
@@ -13126,7 +13085,7 @@
           <a:p>
             <a:fld id="{E80C50CD-E178-4744-9B35-B2F624D6C5E9}" type="datetimeFigureOut">
               <a:rPr lang="en-US" smtClean="0"/>
-              <a:t>9/8/2025</a:t>
+              <a:t>3/11/26</a:t>
             </a:fld>
             <a:endParaRPr lang="en-US"/>
           </a:p>
@@ -13443,7 +13402,7 @@
           <a:p>
             <a:fld id="{E80C50CD-E178-4744-9B35-B2F624D6C5E9}" type="datetimeFigureOut">
               <a:rPr lang="en-US" smtClean="0"/>
-              <a:t>9/8/2025</a:t>
+              <a:t>3/11/26</a:t>
             </a:fld>
             <a:endParaRPr lang="en-US"/>
           </a:p>
@@ -13735,7 +13694,7 @@
           <a:p>
             <a:fld id="{E80C50CD-E178-4744-9B35-B2F624D6C5E9}" type="datetimeFigureOut">
               <a:rPr lang="en-US" smtClean="0"/>
-              <a:t>9/8/2025</a:t>
+              <a:t>3/11/26</a:t>
             </a:fld>
             <a:endParaRPr lang="en-US"/>
           </a:p>
@@ -13975,7 +13934,7 @@
             <a:fld id="{E80C50CD-E178-4744-9B35-B2F624D6C5E9}" type="datetimeFigureOut">
               <a:rPr lang="en-US" smtClean="0"/>
               <a:pPr/>
-              <a:t>9/8/2025</a:t>
+              <a:t>3/11/26</a:t>
             </a:fld>
             <a:endParaRPr lang="en-US"/>
           </a:p>
